--- a/assets/pptx/catalog-583.pptx
+++ b/assets/pptx/catalog-583.pptx
@@ -3252,7 +3252,7 @@
                 <a:ea typeface="Ebrima"/>
                 <a:cs typeface="Ebrima"/>
               </a:rPr>
-              <a:t>ልቤ በእግዚአብሔር ጸና (4x)</a:t>
+              <a:t>ልቤ በእግዚአብሔር ጸና 4x</a:t>
             </a:r>
           </a:p>
           <a:p>
@@ -3270,7 +3270,7 @@
                 <a:ea typeface="Ebrima"/>
                 <a:cs typeface="Ebrima"/>
               </a:rPr>
-              <a:t>እርሱን ተማመነ ሆሆ እርሱን ተማመነ (2x)</a:t>
+              <a:t>እርሱን ተማመነ ሆሆ እርሱን ተማመነ 2x</a:t>
             </a:r>
           </a:p>
         </p:txBody>
@@ -3355,7 +3355,7 @@
                 <a:ea typeface="Ebrima"/>
                 <a:cs typeface="Ebrima"/>
               </a:rPr>
-              <a:t>ለሚፈሩ እምነትን አስለመደ (2x)</a:t>
+              <a:t>ለሚፈሩ እምነትን አስለመደ 2x</a:t>
             </a:r>
           </a:p>
         </p:txBody>
@@ -3440,7 +3440,7 @@
                 <a:ea typeface="Ebrima"/>
                 <a:cs typeface="Ebrima"/>
               </a:rPr>
-              <a:t>ይሄ ማነው የእግዚአብሔር ልጅ ኢየሱስ ነው (2x)</a:t>
+              <a:t>ይሄ ማነው የእግዚአብሔር ልጅ ኢየሱስ ነው 2x</a:t>
             </a:r>
           </a:p>
         </p:txBody>
@@ -3525,7 +3525,7 @@
                 <a:ea typeface="Ebrima"/>
                 <a:cs typeface="Ebrima"/>
               </a:rPr>
-              <a:t>የልቤ አምላክ ተባረክ ሆሆ (4x)</a:t>
+              <a:t>የልቤ አምላክ ተባረክ ሆሆ 4x</a:t>
             </a:r>
           </a:p>
         </p:txBody>
@@ -3610,7 +3610,7 @@
                 <a:ea typeface="Ebrima"/>
                 <a:cs typeface="Ebrima"/>
               </a:rPr>
-              <a:t>የልቤ አምላክ ተባረክ ሆሆ (2x)</a:t>
+              <a:t>የልቤ አምላክ ተባረክ ሆሆ 2x</a:t>
             </a:r>
           </a:p>
         </p:txBody>
@@ -3731,7 +3731,7 @@
                 <a:ea typeface="Ebrima"/>
                 <a:cs typeface="Ebrima"/>
               </a:rPr>
-              <a:t>በእኔ ያስቀመጥከው ዓለምን ሞላዉ (2x)</a:t>
+              <a:t>በእኔ ያስቀመጥከው ዓለምን ሞላዉ 2x</a:t>
             </a:r>
           </a:p>
         </p:txBody>
@@ -3816,7 +3816,7 @@
                 <a:ea typeface="Ebrima"/>
                 <a:cs typeface="Ebrima"/>
               </a:rPr>
-              <a:t>የልቤ አምላክ ተባረክ ሆሆ (2x)</a:t>
+              <a:t>የልቤ አምላክ ተባረክ ሆሆ 2x</a:t>
             </a:r>
           </a:p>
         </p:txBody>
@@ -4022,7 +4022,7 @@
                 <a:ea typeface="Ebrima"/>
                 <a:cs typeface="Ebrima"/>
               </a:rPr>
-              <a:t>የልቤ አምላክ ተባረክ ሆሆ (2x)</a:t>
+              <a:t>የልቤ አምላክ ተባረክ ሆሆ 2x</a:t>
             </a:r>
           </a:p>
         </p:txBody>
@@ -4228,7 +4228,7 @@
                 <a:ea typeface="Ebrima"/>
                 <a:cs typeface="Ebrima"/>
               </a:rPr>
-              <a:t>የልቤ አምላክ ተባረክ ሆሆ (2x)</a:t>
+              <a:t>የልቤ አምላክ ተባረክ ሆሆ 2x</a:t>
             </a:r>
           </a:p>
         </p:txBody>
@@ -4313,7 +4313,7 @@
                 <a:ea typeface="Ebrima"/>
                 <a:cs typeface="Ebrima"/>
               </a:rPr>
-              <a:t>የሥጋ ለባሽ አምላክ የሚያቅተው አለ ወይ (2x)</a:t>
+              <a:t>የሥጋ ለባሽ አምላክ የሚያቅተው አለ ወይ 2x</a:t>
             </a:r>
           </a:p>
         </p:txBody>
